--- a/template/Cluster_SIX_Branches_Template.pptx
+++ b/template/Cluster_SIX_Branches_Template.pptx
@@ -1153,7 +1153,7 @@
                 <a:ea typeface="Plus Jakarta Sans" pitchFamily="34" charset="-122"/>
                 <a:cs typeface="Plus Jakarta Sans" pitchFamily="34" charset="-120"/>
               </a:rPr>
-              <a:t>Daily Operations Report · Cluster 2</a:t>
+              <a:t>Daily Operations Report</a:t>
             </a:r>
             <a:endParaRPr lang="en-US" sz="1500" dirty="0"/>
           </a:p>
@@ -1270,7 +1270,7 @@
                 <a:ea typeface="Plus Jakarta Sans" pitchFamily="34" charset="-122"/>
                 <a:cs typeface="Plus Jakarta Sans" pitchFamily="34" charset="-120"/>
               </a:rPr>
-              <a:t>CLUSTER 2 — DAILY SUMMARY</a:t>
+              <a:t>DAILY SUMMARY</a:t>
             </a:r>
             <a:endParaRPr lang="en-US" sz="1200" dirty="0"/>
           </a:p>
@@ -1413,7 +1413,7 @@
                 <a:ea typeface="Plus Jakarta Sans" pitchFamily="34" charset="-122"/>
                 <a:cs typeface="Plus Jakarta Sans" pitchFamily="34" charset="-120"/>
               </a:rPr>
-              <a:t>Cluster 2</a:t>
+              <a:t>All branches</a:t>
             </a:r>
             <a:endParaRPr lang="en-US" sz="850" dirty="0"/>
           </a:p>
@@ -2085,7 +2085,7 @@
                 <a:ea typeface="Plus Jakarta Sans" pitchFamily="34" charset="-122"/>
                 <a:cs typeface="Plus Jakarta Sans" pitchFamily="34" charset="-120"/>
               </a:rPr>
-              <a:t>Cluster Utilization   </a:t>
+              <a:t>Overall Utilization   </a:t>
             </a:r>
             <a:pPr indent="0" marL="0">
               <a:buNone/>
@@ -2152,7 +2152,7 @@
                 <a:ea typeface="Plus Jakarta Sans" pitchFamily="34" charset="-122"/>
                 <a:cs typeface="Plus Jakarta Sans" pitchFamily="34" charset="-120"/>
               </a:rPr>
-              <a:t>Meena Primary Health Care Centers · Cluster 2 · Meena Primary Health Care Centers · Daily Report · DD MON YYYY</a:t>
+              <a:t>Meena Primary Health Care Centers · Daily Report · DD MON YYYY</a:t>
             </a:r>
             <a:endParaRPr lang="en-US" sz="700" dirty="0"/>
           </a:p>
@@ -3961,7 +3961,7 @@
                 <a:ea typeface="Plus Jakarta Sans" pitchFamily="34" charset="-122"/>
                 <a:cs typeface="Plus Jakarta Sans" pitchFamily="34" charset="-120"/>
               </a:rPr>
-              <a:t>Daily Operations Report · Cluster 2</a:t>
+              <a:t>Daily Operations Report</a:t>
             </a:r>
             <a:endParaRPr lang="en-US" sz="1500" dirty="0"/>
           </a:p>
@@ -6312,7 +6312,7 @@
                 <a:ea typeface="Plus Jakarta Sans" pitchFamily="34" charset="-122"/>
                 <a:cs typeface="Plus Jakarta Sans" pitchFamily="34" charset="-120"/>
               </a:rPr>
-              <a:t>Meena Primary Health Care Centers · Cluster 2 · {Branch} Branch · Daily Report · DD MON YYYY</a:t>
+              <a:t>Meena Primary Health Care Centers · {Branch} Branch · Daily Report · DD MON YYYY</a:t>
             </a:r>
             <a:endParaRPr lang="en-US" sz="700" dirty="0"/>
           </a:p>
@@ -6840,7 +6840,7 @@
                 <a:ea typeface="Plus Jakarta Sans" pitchFamily="34" charset="-122"/>
                 <a:cs typeface="Plus Jakarta Sans" pitchFamily="34" charset="-120"/>
               </a:rPr>
-              <a:t>Daily Operations Report · Cluster 2</a:t>
+              <a:t>Daily Operations Report</a:t>
             </a:r>
             <a:endParaRPr lang="en-US" sz="1500" dirty="0"/>
           </a:p>
@@ -9470,7 +9470,7 @@
                 <a:ea typeface="Plus Jakarta Sans" pitchFamily="34" charset="-122"/>
                 <a:cs typeface="Plus Jakarta Sans" pitchFamily="34" charset="-120"/>
               </a:rPr>
-              <a:t>Meena Primary Health Care Centers · Cluster 2 · {Branch} Branch (cont.) · Daily Report · DD MON YYYY</a:t>
+              <a:t>Meena Primary Health Care Centers · {Branch} Branch (cont.) · Daily Report · DD MON YYYY</a:t>
             </a:r>
             <a:endParaRPr lang="en-US" sz="700" dirty="0"/>
           </a:p>

--- a/template/Cluster_SIX_Branches_Template.pptx
+++ b/template/Cluster_SIX_Branches_Template.pptx
@@ -1621,7 +1621,7 @@
                 <a:ea typeface="Plus Jakarta Sans" pitchFamily="34" charset="-122"/>
                 <a:cs typeface="Plus Jakarta Sans" pitchFamily="34" charset="-120"/>
               </a:rPr>
-              <a:t>EMERGENCY</a:t>
+              <a:t>NO SHOW</a:t>
             </a:r>
             <a:endParaRPr lang="en-US" sz="900" dirty="0"/>
           </a:p>
@@ -1942,7 +1942,7 @@
                 <a:ea typeface="Plus Jakarta Sans" pitchFamily="34" charset="-122"/>
                 <a:cs typeface="Plus Jakarta Sans" pitchFamily="34" charset="-120"/>
               </a:rPr>
-              <a:t>Emergency</a:t>
+              <a:t>No Show</a:t>
             </a:r>
             <a:endParaRPr lang="en-US" sz="900" dirty="0"/>
           </a:p>
